--- a/dist/초6/영어/말하기와쓰기/초6_영어_말하기와쓰기_01_계획말하기_학생용.pptx
+++ b/dist/초6/영어/말하기와쓰기/초6_영어_말하기와쓰기_01_계획말하기_학생용.pptx
@@ -119,20 +119,20 @@
   <p:extLst>
     <p:ext uri="{521415D9-36F7-43E2-AB2F-B90AF26B5E84}">
       <p14:sectionLst xmlns:p14="http://schemas.microsoft.com/office/powerpoint/2010/main">
-        <p14:section name="도입" id="{e6be2c5f-3e8d-ca57-469a-c2439c7f0c1f}">
+        <p14:section name="도입" id="{7561a871-4675-ca1a-db49-513c9f8b90d9}">
           <p14:sldIdLst>
             <p14:sldId id="256"/>
             <p14:sldId id="257"/>
           </p14:sldIdLst>
         </p14:section>
-        <p14:section name="개념" id="{bd88e0fb-8d55-1631-4751-087fcb84d986}">
+        <p14:section name="개념" id="{9cb91114-fb9e-de70-1af6-5ceeacfc6e1f}">
           <p14:sldIdLst>
             <p14:sldId id="258"/>
             <p14:sldId id="259"/>
             <p14:sldId id="260"/>
           </p14:sldIdLst>
         </p14:section>
-        <p14:section name="연습" id="{4e84d023-f818-93a3-7897-f513f9706621}">
+        <p14:section name="연습" id="{e19a8ac6-4a6e-6094-bc7f-4db0a30517c0}">
           <p14:sldIdLst>
             <p14:sldId id="261"/>
             <p14:sldId id="262"/>
@@ -140,18 +140,18 @@
             <p14:sldId id="264"/>
           </p14:sldIdLst>
         </p14:section>
-        <p14:section name="확인" id="{6c55f266-2b76-b6cd-685c-7851266723c5}">
+        <p14:section name="확인" id="{b5d86f45-20c6-f85d-14ed-66c9d97ecdc3}">
           <p14:sldIdLst>
             <p14:sldId id="265"/>
             <p14:sldId id="266"/>
           </p14:sldIdLst>
         </p14:section>
-        <p14:section name="정리" id="{36208567-39ac-d08b-7992-fc957cfa7794}">
+        <p14:section name="정리" id="{0c19e5c4-db29-a9c5-9b08-c446a28863ac}">
           <p14:sldIdLst>
             <p14:sldId id="267"/>
           </p14:sldIdLst>
         </p14:section>
-        <p14:section name="보충" id="{d41c9b30-09f1-e606-1b2a-665e270f04ae}">
+        <p14:section name="보충" id="{3ef145e2-da73-fa64-2ace-51463a6b7d82}">
           <p14:sldIdLst>
             <p14:sldId id="268"/>
           </p14:sldIdLst>
@@ -5720,8 +5720,8 @@
         </p:nvSpPr>
         <p:spPr>
           <a:xfrm>
-            <a:off x="868680" y="2376551"/>
-            <a:ext cx="3422904" cy="454025"/>
+            <a:off x="868680" y="2211451"/>
+            <a:ext cx="3422904" cy="619125"/>
           </a:xfrm>
           <a:prstGeom prst="rect">
             <a:avLst/>
@@ -5737,7 +5737,7 @@
               <a:buNone/>
             </a:pPr>
             <a:r>
-              <a:rPr lang="en-US" altLang="ko-KR" sz="2200" b="1" dirty="0">
+              <a:rPr lang="en-US" altLang="ko-KR" sz="3000" b="1" dirty="0">
                 <a:solidFill>
                   <a:srgbClr val="1F2937"/>
                 </a:solidFill>
@@ -5747,7 +5747,7 @@
               </a:rPr>
               <a:t>yesterday</a:t>
             </a:r>
-            <a:endParaRPr lang="ko-KR" sz="2200" dirty="0"/>
+            <a:endParaRPr lang="ko-KR" sz="3000" dirty="0"/>
           </a:p>
         </p:txBody>
       </p:sp>
@@ -5760,7 +5760,7 @@
         <p:spPr>
           <a:xfrm>
             <a:off x="868680" y="3287776"/>
-            <a:ext cx="3422904" cy="342900"/>
+            <a:ext cx="3422904" cy="474980"/>
           </a:xfrm>
           <a:prstGeom prst="rect">
             <a:avLst/>
@@ -5776,7 +5776,7 @@
               <a:buNone/>
             </a:pPr>
             <a:r>
-              <a:rPr lang="ko-KR" altLang="en-US" sz="1800" dirty="0">
+              <a:rPr lang="ko-KR" altLang="en-US" sz="2600" dirty="0">
                 <a:solidFill>
                   <a:srgbClr val="4B5563"/>
                 </a:solidFill>
@@ -5786,7 +5786,7 @@
               </a:rPr>
               <a:t>어제 · 지난 일</a:t>
             </a:r>
-            <a:endParaRPr lang="ko-KR" sz="1800" dirty="0"/>
+            <a:endParaRPr lang="ko-KR" sz="2600" dirty="0"/>
           </a:p>
         </p:txBody>
       </p:sp>
@@ -5823,8 +5823,8 @@
         </p:nvSpPr>
         <p:spPr>
           <a:xfrm>
-            <a:off x="4383024" y="2376551"/>
-            <a:ext cx="3422904" cy="454025"/>
+            <a:off x="4383024" y="2211451"/>
+            <a:ext cx="3422904" cy="619125"/>
           </a:xfrm>
           <a:prstGeom prst="rect">
             <a:avLst/>
@@ -5840,7 +5840,7 @@
               <a:buNone/>
             </a:pPr>
             <a:r>
-              <a:rPr lang="en-US" altLang="ko-KR" sz="2200" b="1" dirty="0">
+              <a:rPr lang="en-US" altLang="ko-KR" sz="3000" b="1" dirty="0">
                 <a:solidFill>
                   <a:srgbClr val="1F2937"/>
                 </a:solidFill>
@@ -5850,7 +5850,7 @@
               </a:rPr>
               <a:t>today</a:t>
             </a:r>
-            <a:endParaRPr lang="ko-KR" sz="2200" dirty="0"/>
+            <a:endParaRPr lang="ko-KR" sz="3000" dirty="0"/>
           </a:p>
         </p:txBody>
       </p:sp>
@@ -5863,7 +5863,7 @@
         <p:spPr>
           <a:xfrm>
             <a:off x="4383024" y="3287776"/>
-            <a:ext cx="3422904" cy="342900"/>
+            <a:ext cx="3422904" cy="474980"/>
           </a:xfrm>
           <a:prstGeom prst="rect">
             <a:avLst/>
@@ -5879,7 +5879,7 @@
               <a:buNone/>
             </a:pPr>
             <a:r>
-              <a:rPr lang="ko-KR" altLang="en-US" sz="1800" dirty="0">
+              <a:rPr lang="ko-KR" altLang="en-US" sz="2600" dirty="0">
                 <a:solidFill>
                   <a:srgbClr val="4B5563"/>
                 </a:solidFill>
@@ -5889,7 +5889,7 @@
               </a:rPr>
               <a:t>오늘</a:t>
             </a:r>
-            <a:endParaRPr lang="ko-KR" sz="1800" dirty="0"/>
+            <a:endParaRPr lang="ko-KR" sz="2600" dirty="0"/>
           </a:p>
         </p:txBody>
       </p:sp>
@@ -5926,8 +5926,8 @@
         </p:nvSpPr>
         <p:spPr>
           <a:xfrm>
-            <a:off x="7897368" y="2376551"/>
-            <a:ext cx="3422904" cy="454025"/>
+            <a:off x="7897368" y="2211451"/>
+            <a:ext cx="3422904" cy="619125"/>
           </a:xfrm>
           <a:prstGeom prst="rect">
             <a:avLst/>
@@ -5943,7 +5943,7 @@
               <a:buNone/>
             </a:pPr>
             <a:r>
-              <a:rPr lang="en-US" altLang="ko-KR" sz="2200" b="1" dirty="0">
+              <a:rPr lang="en-US" altLang="ko-KR" sz="3000" b="1" dirty="0">
                 <a:solidFill>
                   <a:srgbClr val="1F2937"/>
                 </a:solidFill>
@@ -5953,7 +5953,7 @@
               </a:rPr>
               <a:t>tomorrow</a:t>
             </a:r>
-            <a:endParaRPr lang="ko-KR" sz="2200" dirty="0"/>
+            <a:endParaRPr lang="ko-KR" sz="3000" dirty="0"/>
           </a:p>
         </p:txBody>
       </p:sp>
@@ -5966,7 +5966,7 @@
         <p:spPr>
           <a:xfrm>
             <a:off x="7897368" y="3287776"/>
-            <a:ext cx="3422904" cy="342900"/>
+            <a:ext cx="3422904" cy="474980"/>
           </a:xfrm>
           <a:prstGeom prst="rect">
             <a:avLst/>
@@ -5982,7 +5982,7 @@
               <a:buNone/>
             </a:pPr>
             <a:r>
-              <a:rPr lang="ko-KR" altLang="en-US" sz="1800" dirty="0">
+              <a:rPr lang="ko-KR" altLang="en-US" sz="2600" dirty="0">
                 <a:solidFill>
                   <a:srgbClr val="4B5563"/>
                 </a:solidFill>
@@ -5992,7 +5992,7 @@
               </a:rPr>
               <a:t>내일 · 계획</a:t>
             </a:r>
-            <a:endParaRPr lang="ko-KR" sz="1800" dirty="0"/>
+            <a:endParaRPr lang="ko-KR" sz="2600" dirty="0"/>
           </a:p>
         </p:txBody>
       </p:sp>
@@ -7854,7 +7854,7 @@
                 <a:ea typeface="맑은 고딕" pitchFamily="34" charset="-122"/>
                 <a:cs typeface="맑은 고딕" pitchFamily="34" charset="-120"/>
               </a:rPr>
-              <a:t>지난 일: yesterday, -ed　·　계획: tomorrow, this weekend, going to</a:t>
+              <a:t>지난 일: yesterday, -ed　·　계획: tomorrow, this weekend, going to</a:t>
             </a:r>
             <a:endParaRPr lang="ko-KR" sz="2800" dirty="0"/>
           </a:p>

--- a/dist/초6/영어/말하기와쓰기/초6_영어_말하기와쓰기_01_계획말하기_학생용.pptx
+++ b/dist/초6/영어/말하기와쓰기/초6_영어_말하기와쓰기_01_계획말하기_학생용.pptx
@@ -119,20 +119,20 @@
   <p:extLst>
     <p:ext uri="{521415D9-36F7-43E2-AB2F-B90AF26B5E84}">
       <p14:sectionLst xmlns:p14="http://schemas.microsoft.com/office/powerpoint/2010/main">
-        <p14:section name="도입" id="{7561a871-4675-ca1a-db49-513c9f8b90d9}">
+        <p14:section name="도입" id="{77773264-d7c7-1d45-6904-48e7c3d4b336}">
           <p14:sldIdLst>
             <p14:sldId id="256"/>
             <p14:sldId id="257"/>
           </p14:sldIdLst>
         </p14:section>
-        <p14:section name="개념" id="{9cb91114-fb9e-de70-1af6-5ceeacfc6e1f}">
+        <p14:section name="개념" id="{a0f4b194-f909-d260-6633-13aa9c6b42b3}">
           <p14:sldIdLst>
             <p14:sldId id="258"/>
             <p14:sldId id="259"/>
             <p14:sldId id="260"/>
           </p14:sldIdLst>
         </p14:section>
-        <p14:section name="연습" id="{e19a8ac6-4a6e-6094-bc7f-4db0a30517c0}">
+        <p14:section name="연습" id="{75cb875c-6549-5427-6c18-41a51ac10d3b}">
           <p14:sldIdLst>
             <p14:sldId id="261"/>
             <p14:sldId id="262"/>
@@ -140,18 +140,18 @@
             <p14:sldId id="264"/>
           </p14:sldIdLst>
         </p14:section>
-        <p14:section name="확인" id="{b5d86f45-20c6-f85d-14ed-66c9d97ecdc3}">
+        <p14:section name="확인" id="{ae303a8e-ca06-aaaa-6364-9e4c693de243}">
           <p14:sldIdLst>
             <p14:sldId id="265"/>
             <p14:sldId id="266"/>
           </p14:sldIdLst>
         </p14:section>
-        <p14:section name="정리" id="{0c19e5c4-db29-a9c5-9b08-c446a28863ac}">
+        <p14:section name="정리" id="{06ca0a15-412c-6080-4eb6-322b2711ac07}">
           <p14:sldIdLst>
             <p14:sldId id="267"/>
           </p14:sldIdLst>
         </p14:section>
-        <p14:section name="보충" id="{3ef145e2-da73-fa64-2ace-51463a6b7d82}">
+        <p14:section name="보충" id="{1c6d89cb-a9d4-2426-7930-742af6036629}">
           <p14:sldIdLst>
             <p14:sldId id="268"/>
           </p14:sldIdLst>
